--- a/it/slides/19-Architettura_dei_Calcolatori-Istruzioni_e_Interruzioni-Lab.pptx
+++ b/it/slides/19-Architettura_dei_Calcolatori-Istruzioni_e_Interruzioni-Lab.pptx
@@ -125,34 +125,34 @@
   <p:extLst>
     <p:ext uri="{521415D9-36F7-43E2-AB2F-B90AF26B5E84}">
       <p14:sectionLst xmlns:p14="http://schemas.microsoft.com/office/powerpoint/2010/main">
-        <p14:section name="Apertura" id="{5c59bc0b-a7a3-9d0a-5460-12788882490e}">
+        <p14:section name="Apertura" id="{9131d356-edd8-704f-0b31-33616e82b592}">
           <p14:sldIdLst>
             <p14:sldId id="256"/>
             <p14:sldId id="257"/>
           </p14:sldIdLst>
         </p14:section>
-        <p14:section name="Riscaldamento sulla macchina" id="{51f78b9d-a709-5ed1-cb9b-421a13b8b527}">
+        <p14:section name="Riscaldamento sulla macchina" id="{feff3ef1-175e-aea7-ade7-69ea5423e686}">
           <p14:sldIdLst>
             <p14:sldId id="258"/>
           </p14:sldIdLst>
         </p14:section>
-        <p14:section name="Istruzioni" id="{ae0b8d1d-7226-ed32-4a29-40aaa66db646}">
+        <p14:section name="Istruzioni" id="{3ccdedcf-a0e0-07a1-6b47-373f6e8976e9}">
           <p14:sldIdLst>
             <p14:sldId id="259"/>
           </p14:sldIdLst>
         </p14:section>
-        <p14:section name="Il ciclo del processore" id="{8c659fde-5fc5-5401-6919-0467495ac334}">
+        <p14:section name="Il ciclo del processore" id="{954310ec-2eee-f8ce-5164-87e7e7ecd0f2}">
           <p14:sldIdLst>
             <p14:sldId id="260"/>
             <p14:sldId id="261"/>
           </p14:sldIdLst>
         </p14:section>
-        <p14:section name="La soluzione di RISC-V" id="{1e02e16c-18a9-5f8f-d452-b67404bbbc18}">
+        <p14:section name="La soluzione di RISC-V" id="{79c29c56-d392-352c-51be-718f38685190}">
           <p14:sldIdLst>
             <p14:sldId id="262"/>
           </p14:sldIdLst>
         </p14:section>
-        <p14:section name="Il programma completo" id="{c1544408-a4f8-b3b3-1032-25f2077e7064}">
+        <p14:section name="Il programma completo" id="{7bf0a6a3-938d-9e1a-1c5b-3d57293d7036}">
           <p14:sldIdLst>
             <p14:sldId id="263"/>
             <p14:sldId id="264"/>
@@ -162,7 +162,7 @@
             <p14:sldId id="268"/>
           </p14:sldIdLst>
         </p14:section>
-        <p14:section name="Eseguire e provare" id="{3195783d-168d-d038-65a1-6544e4ef02f7}">
+        <p14:section name="Eseguire e provare" id="{8dda8237-d363-82ab-4a7a-b37e77020b6d}">
           <p14:sldIdLst>
             <p14:sldId id="269"/>
             <p14:sldId id="270"/>
@@ -171,7 +171,7 @@
             <p14:sldId id="273"/>
           </p14:sldIdLst>
         </p14:section>
-        <p14:section name="Esercizi" id="{493984a4-a7ed-7d88-70c1-39d345b3264e}">
+        <p14:section name="Esercizi" id="{bda81455-ecb2-3d0f-2117-14589c6cbea9}">
           <p14:sldIdLst>
             <p14:sldId id="274"/>
           </p14:sldIdLst>

--- a/it/slides/19-Architettura_dei_Calcolatori-Istruzioni_e_Interruzioni-Lab.pptx
+++ b/it/slides/19-Architettura_dei_Calcolatori-Istruzioni_e_Interruzioni-Lab.pptx
@@ -125,34 +125,34 @@
   <p:extLst>
     <p:ext uri="{521415D9-36F7-43E2-AB2F-B90AF26B5E84}">
       <p14:sectionLst xmlns:p14="http://schemas.microsoft.com/office/powerpoint/2010/main">
-        <p14:section name="Apertura" id="{9131d356-edd8-704f-0b31-33616e82b592}">
+        <p14:section name="Apertura" id="{8dae7ffe-686f-a24e-98f2-0ed5436b0e6c}">
           <p14:sldIdLst>
             <p14:sldId id="256"/>
             <p14:sldId id="257"/>
           </p14:sldIdLst>
         </p14:section>
-        <p14:section name="Riscaldamento sulla macchina" id="{feff3ef1-175e-aea7-ade7-69ea5423e686}">
+        <p14:section name="Riscaldamento sulla macchina" id="{12945271-981d-7c21-0372-69d7d1552f10}">
           <p14:sldIdLst>
             <p14:sldId id="258"/>
           </p14:sldIdLst>
         </p14:section>
-        <p14:section name="Istruzioni" id="{3ccdedcf-a0e0-07a1-6b47-373f6e8976e9}">
+        <p14:section name="Istruzioni" id="{d89aa7f0-9efa-56e8-572d-5326e1ab5b2d}">
           <p14:sldIdLst>
             <p14:sldId id="259"/>
           </p14:sldIdLst>
         </p14:section>
-        <p14:section name="Il ciclo del processore" id="{954310ec-2eee-f8ce-5164-87e7e7ecd0f2}">
+        <p14:section name="Il ciclo del processore" id="{2b9855de-af12-743f-1757-dc1ca4586d8e}">
           <p14:sldIdLst>
             <p14:sldId id="260"/>
             <p14:sldId id="261"/>
           </p14:sldIdLst>
         </p14:section>
-        <p14:section name="La soluzione di RISC-V" id="{79c29c56-d392-352c-51be-718f38685190}">
+        <p14:section name="La soluzione di RISC-V" id="{da96641d-d64e-7499-f26c-a9f8bb017aa9}">
           <p14:sldIdLst>
             <p14:sldId id="262"/>
           </p14:sldIdLst>
         </p14:section>
-        <p14:section name="Il programma completo" id="{7bf0a6a3-938d-9e1a-1c5b-3d57293d7036}">
+        <p14:section name="Il programma completo" id="{debe2294-c90a-71b3-3243-00930d23c7c7}">
           <p14:sldIdLst>
             <p14:sldId id="263"/>
             <p14:sldId id="264"/>
@@ -162,7 +162,7 @@
             <p14:sldId id="268"/>
           </p14:sldIdLst>
         </p14:section>
-        <p14:section name="Eseguire e provare" id="{8dda8237-d363-82ab-4a7a-b37e77020b6d}">
+        <p14:section name="Eseguire e provare" id="{a308c7c9-f555-e658-115b-b81e550e810a}">
           <p14:sldIdLst>
             <p14:sldId id="269"/>
             <p14:sldId id="270"/>
@@ -171,7 +171,7 @@
             <p14:sldId id="273"/>
           </p14:sldIdLst>
         </p14:section>
-        <p14:section name="Esercizi" id="{bda81455-ecb2-3d0f-2117-14589c6cbea9}">
+        <p14:section name="Esercizi" id="{677d27d1-3d3c-9264-ca0d-256b89ffcd0b}">
           <p14:sldIdLst>
             <p14:sldId id="274"/>
           </p14:sldIdLst>
@@ -582,7 +582,8 @@
               <a:rPr lang="en-US" dirty="0"/>
               <a:t>Questa è la presentazione del codice della Lezione 19. Mentre la presentazione della lezione sviluppa i concetti, questa raccoglie tutto ciò che si scrive e si esegue: ogni listato con il suo commento, il programma completo della lezione, il risultato che deve produrre, e la procedura per provarlo su ciascuno dei tre host. Le due presentazioni vanno lette insieme: i concetti spiegano il codice, e il codice dà ai concetti una conseguenza osservabile.
 Stato di apprendimento: DA COMPRENDERE OGGI, alla fine di questa lezione lo spiegate, lo seguite passo passo e lo applicate da soli; DA UTILIZZARE OGGI, oggi seguite e usate la ricetta; come funziona dentro si spiega più avanti, o non fa parte del corso; DA COMPRENDERE PIÙ AVANTI, riconoscete il nome e lo scopo; lo spiega una lezione successiva. Una slide senza etichetta è contesto: una storia, un esempio, una domanda, un esercizio.
-Stato di apprendimento di questa lezione. DA COMPRENDERE OGGI: formati delle istruzioni; i modi di indirizzamento; il ciclo del processore; interruzioni e trap. DA UTILIZZARE OGGI: il programma completo, gli strumenti di PRG32 (si usa, non si studia, in questo corso). DA COMPRENDERE PIÙ AVANTI: niente. Una slide senza etichetta è contesto: una storia, un esempio, una domanda, un esercizio.</a:t>
+Stato di apprendimento di questa lezione. DA COMPRENDERE OGGI: formati delle istruzioni; i modi di indirizzamento; il ciclo del processore; interruzioni e trap. DA UTILIZZARE OGGI: il programma completo, gli strumenti di PRG32 (si usa, non si studia, in questo corso). DA COMPRENDERE PIÙ AVANTI: niente. Una slide senza etichetta è contesto: una storia, un esempio, una domanda, un esercizio.
+Percorso. I risultati di oggi: (1) decodificare un'istruzione RISC-V nei suoi campi; (2) nominare il modo di indirizzamento di ogni operando; (3) descrivere il ciclo dell'istruzione e che cosa cambia un'interruzione. Si appoggia su: solo ciò che ha preparato la Lezione 01. Prossimo passo: Lezione 20, I bus e la scheda video.</a:t>
             </a:r>
             <a:endParaRPr lang="en-US" dirty="0"/>
           </a:p>
